--- a/how_to_use_the_snap_qc_exclusion_rules_scripts.pptx
+++ b/how_to_use_the_snap_qc_exclusion_rules_scripts.pptx
@@ -2972,7 +2972,7 @@
                 <a:cs typeface="Arial"/>
                 <a:sym typeface="Arial"/>
               </a:rPr>
-              <a:t>Trimming a SNAP QC review pile — EXCL_ scripts</a:t>
+              <a:t>Trimming a SNAP QC review pile: EXCL_ scripts</a:t>
             </a:r>
             <a:endParaRPr sz="1800" b="0" i="0" u="none" strike="noStrike" cap="none">
               <a:solidFill>
@@ -3437,7 +3437,7 @@
                 <a:cs typeface="Arial"/>
                 <a:sym typeface="Arial"/>
               </a:rPr>
-              <a:t>An “exclusion” rule marks a case as low-risk — unlikely to have a significant error.</a:t>
+              <a:t>An “exclusion” rule marks a case as low-risk: unlikely to have a significant error.</a:t>
             </a:r>
             <a:endParaRPr sz="1500">
               <a:solidFill>
@@ -3751,7 +3751,7 @@
                 <a:cs typeface="Arial"/>
                 <a:sym typeface="Arial"/>
               </a:rPr>
-              <a:t>Workload cut — </a:t>
+              <a:t>Workload cut: </a:t>
             </a:r>
             <a:r>
               <a:rPr lang="en-US" sz="1450">
@@ -3800,7 +3800,7 @@
                 <a:cs typeface="Arial"/>
                 <a:sym typeface="Arial"/>
               </a:rPr>
-              <a:t>Dollar retention — </a:t>
+              <a:t>Dollar retention: </a:t>
             </a:r>
             <a:r>
               <a:rPr lang="en-US" sz="1450">
@@ -3849,7 +3849,7 @@
                 <a:cs typeface="Arial"/>
                 <a:sym typeface="Arial"/>
               </a:rPr>
-              <a:t>RuleFit — </a:t>
+              <a:t>RuleFit: </a:t>
             </a:r>
             <a:r>
               <a:rPr lang="en-US" sz="1450">
@@ -3902,7 +3902,7 @@
                 <a:cs typeface="Arial"/>
                 <a:sym typeface="Arial"/>
               </a:rPr>
-              <a:t>Net — </a:t>
+              <a:t>Net: </a:t>
             </a:r>
             <a:r>
               <a:rPr lang="en-US" sz="1450">
@@ -3951,7 +3951,7 @@
                 <a:cs typeface="Arial"/>
                 <a:sym typeface="Arial"/>
               </a:rPr>
-              <a:t>By household size — </a:t>
+              <a:t>By household size: </a:t>
             </a:r>
             <a:r>
               <a:rPr lang="en-US" sz="1450">
@@ -4000,7 +4000,7 @@
                 <a:cs typeface="Arial"/>
                 <a:sym typeface="Arial"/>
               </a:rPr>
-              <a:t>Retention floor — </a:t>
+              <a:t>Retention floor: </a:t>
             </a:r>
             <a:r>
               <a:rPr lang="en-US" sz="1450">
@@ -5709,7 +5709,7 @@
                 <a:cs typeface="Cambria"/>
                 <a:sym typeface="Cambria"/>
               </a:rPr>
-              <a:t>EXCL_find_exclusion_rules_by_hh_size.R — mine and combine exclusion rules</a:t>
+              <a:t>EXCL_find_exclusion_rules_by_hh_size.R: mine and combine exclusion rules</a:t>
             </a:r>
             <a:endParaRPr sz="2800">
               <a:solidFill>
@@ -6397,7 +6397,7 @@
                 <a:cs typeface="Cambria"/>
                 <a:sym typeface="Cambria"/>
               </a:rPr>
-              <a:t>EXCL_find_ output — candidate exclusion rules by household size</a:t>
+              <a:t>EXCL_find_ output: candidate exclusion rules by household size</a:t>
             </a:r>
             <a:endParaRPr sz="2800">
               <a:solidFill>
@@ -9596,7 +9596,7 @@
                 <a:cs typeface="Cambria"/>
                 <a:sym typeface="Cambria"/>
               </a:rPr>
-              <a:t>EXCL_find_ — combining rules to hit retention floors</a:t>
+              <a:t>EXCL_find_: combining rules to hit retention floors</a:t>
             </a:r>
             <a:endParaRPr sz="2800">
               <a:solidFill>
@@ -12589,7 +12589,7 @@
                 <a:cs typeface="Cambria"/>
                 <a:sym typeface="Cambria"/>
               </a:rPr>
-              <a:t>Tuning exclusion rules for a specific state — EXCL_optimize_single_ and EXCL_optimize_set_</a:t>
+              <a:t>Tuning exclusion rules for a specific state: EXCL_optimize_single_ and EXCL_optimize_set_</a:t>
             </a:r>
             <a:endParaRPr sz="2800">
               <a:solidFill>
